--- a/02_실전캠프_Day2_실습제출/2조_김은정_떡기리/발표자료.pptx
+++ b/02_실전캠프_Day2_실습제출/2조_김은정_떡기리/발표자료.pptx
@@ -876,10 +876,10 @@
           <a:p>
             <a:r>
               <a:rPr lang="en-US" dirty="0"/>
-              <a:t>[0:20] 떡기리 브랜드 홈페이지
-대표 운영 OS와 별도로, 고객이 보는 떡기리 홈페이지도 AI와 함께 만들었습니다. 브랜드 이야기, 대표 상품, 선물세트, 매장 안내를 담았습니다.
-■ 참고: https://ddeokgiri-v2.vercel.app (실제 공개 사이트). 실시간 시연은 하지 않음.
-■ 넘김: 바로 넘김</a:t>
+              <a:t>[0:25] 인스타→스레드 콘텐츠 변환 도구
+다음은 장사스쿨 과제로 만든 콘텐츠 변환기입니다. 글을 직접 써 주는 건 아니고, 주제를 넣으면 프롬프트를 만들어 줍니다. 그걸 ChatGPT나 클로드에 붙여넣으면, 같은 선물세트 이야기가 스레드에서는 사장님 말투가 됩니다.
+■ 참고: index.html 한 장짜리 웹 도구(외부 AI 연결 없음). 주제·사진 설명·목적 → 인스타 설계 프롬프트 + 스레드 변환 프롬프트 생성. Claude 아티팩트로 공개. 화면 글은 '떡 선물세트' 실행 예시에서 가져오고 과장 표현 한 곳을 다듬음.
+■ 넘김: "사장님 말투가 됩니다" 다음에 넘김</a:t>
             </a:r>
             <a:endParaRPr lang="en-US" dirty="0"/>
           </a:p>
@@ -967,10 +967,10 @@
           <a:p>
             <a:r>
               <a:rPr lang="en-US" dirty="0"/>
-              <a:t>[0:25] 인스타→스레드 콘텐츠 변환 도구
-마지막은 장사스쿨 과제로 만든 콘텐츠 변환기입니다. 글을 직접 써 주는 건 아니고, 주제를 넣으면 프롬프트를 만들어 줍니다. 그걸 ChatGPT나 클로드에 붙여넣으면, 같은 선물세트 이야기가 스레드에서는 사장님 말투가 됩니다.
-■ 참고: index.html 한 장짜리 웹 도구(외부 AI 연결 없음). 주제·사진 설명·목적 → 인스타 설계 프롬프트 + 스레드 변환 프롬프트 생성. Claude 아티팩트로 공개. 화면 글은 '떡 선물세트' 실행 예시에서 가져오고 과장 표현 한 곳을 다듬음.
-■ 넘김: "사장님 말투가 됩니다" 다음에 15장</a:t>
+              <a:t>[0:20] 떡기리 브랜드 홈페이지
+마지막으로, 대표 운영 OS와 별도로 고객이 보는 떡기리 홈페이지도 AI와 함께 만들었습니다. 브랜드 이야기, 대표 상품, 선물세트, 매장 안내를 담았습니다.
+■ 참고: https://ddeokgiri-v2.vercel.app (실제 공개 사이트). 실시간 시연은 하지 않음.
+■ 넘김: "매장 안내를 담았습니다" 다음에 15장</a:t>
             </a:r>
             <a:endParaRPr lang="en-US" dirty="0"/>
           </a:p>
@@ -4510,7 +4510,7 @@
                 <a:ea typeface="Malgun Gothic" pitchFamily="34" charset="-122"/>
                 <a:cs typeface="Malgun Gothic" pitchFamily="34" charset="-120"/>
               </a:rPr>
-              <a:t>별도 프로그램 · 브랜드 홈페이지</a:t>
+              <a:t>별도 프로그램 · 콘텐츠 변환 도구</a:t>
             </a:r>
             <a:endParaRPr lang="en-US" sz="1400" dirty="0"/>
           </a:p>
@@ -4549,7 +4549,7 @@
                 <a:ea typeface="Malgun Gothic" pitchFamily="34" charset="-122"/>
                 <a:cs typeface="Malgun Gothic" pitchFamily="34" charset="-120"/>
               </a:rPr>
-              <a:t>고객이 만나는 떡기리도, AI와 직접</a:t>
+              <a:t>인스타그램 글을, 스레드 말투로</a:t>
             </a:r>
             <a:endParaRPr lang="en-US" sz="3200" dirty="0"/>
           </a:p>
@@ -4557,14 +4557,53 @@
       </p:sp>
       <p:sp>
         <p:nvSpPr>
-          <p:cNvPr id="4" name="Shape 2"/>
+          <p:cNvPr id="4" name="Text 2"/>
+          <p:cNvSpPr txBox="1"/>
+          <p:nvPr/>
+        </p:nvSpPr>
+        <p:spPr>
+          <a:xfrm>
+            <a:off x="685800" y="1508760"/>
+            <a:ext cx="10515600" cy="365760"/>
+          </a:xfrm>
+          <a:prstGeom prst="rect">
+            <a:avLst/>
+          </a:prstGeom>
+          <a:noFill/>
+          <a:ln/>
+        </p:spPr>
+        <p:txBody>
+          <a:bodyPr wrap="square" lIns="0" tIns="0" rIns="0" bIns="0" rtlCol="0" anchor="t"/>
+          <a:lstStyle/>
+          <a:p>
+            <a:pPr indent="0" marL="0">
+              <a:buNone/>
+            </a:pPr>
+            <a:r>
+              <a:rPr lang="en-US" sz="1500" b="1" dirty="0">
+                <a:solidFill>
+                  <a:srgbClr val="103D3A"/>
+                </a:solidFill>
+                <a:latin typeface="Malgun Gothic" pitchFamily="34" charset="0"/>
+                <a:ea typeface="Malgun Gothic" pitchFamily="34" charset="-122"/>
+                <a:cs typeface="Malgun Gothic" pitchFamily="34" charset="-120"/>
+              </a:rPr>
+              <a:t>주제 입력  →  프롬프트 생성  →  ChatGPT·Claude에 붙여넣기  →  인스타·스레드 글</a:t>
+            </a:r>
+            <a:endParaRPr lang="en-US" sz="1500" dirty="0"/>
+          </a:p>
+        </p:txBody>
+      </p:sp>
+      <p:sp>
+        <p:nvSpPr>
+          <p:cNvPr id="5" name="Shape 3"/>
           <p:cNvSpPr/>
           <p:nvPr/>
         </p:nvSpPr>
         <p:spPr>
           <a:xfrm>
-            <a:off x="640080" y="1783080"/>
-            <a:ext cx="7680960" cy="4834890"/>
+            <a:off x="640080" y="1828800"/>
+            <a:ext cx="4937760" cy="4056611"/>
           </a:xfrm>
           <a:prstGeom prst="rect">
             <a:avLst/>
@@ -4589,9 +4628,7 @@
       </p:sp>
       <p:pic>
         <p:nvPicPr>
-          <p:cNvPr id="5" name="Image 0" descr="떡기리 발표 이미지">
-            <a:hlinkClick r:id="rId2" tooltip="https://ddeokgiri-v2.vercel.app/"/>
-          </p:cNvPr>
+          <p:cNvPr id="6" name="Image 0" descr="떡기리 발표 이미지">    </p:cNvPr>
           <p:cNvPicPr>
             <a:picLocks noChangeAspect="1"/>
           </p:cNvPicPr>
@@ -4605,8 +4642,8 @@
         </p:blipFill>
         <p:spPr>
           <a:xfrm>
-            <a:off x="685800" y="1828800"/>
-            <a:ext cx="7589520" cy="4743450"/>
+            <a:off x="685800" y="1874520"/>
+            <a:ext cx="4846320" cy="3965171"/>
           </a:xfrm>
           <a:prstGeom prst="rect">
             <a:avLst/>
@@ -4615,14 +4652,14 @@
       </p:pic>
       <p:sp>
         <p:nvSpPr>
-          <p:cNvPr id="6" name="Text 3"/>
-          <p:cNvSpPr txBox="1"/>
-          <p:nvPr/>
-        </p:nvSpPr>
-        <p:spPr>
-          <a:xfrm>
-            <a:off x="685800" y="6263640"/>
-            <a:ext cx="1737360" cy="274320"/>
+          <p:cNvPr id="7" name="Text 4"/>
+          <p:cNvSpPr txBox="1"/>
+          <p:nvPr/>
+        </p:nvSpPr>
+        <p:spPr>
+          <a:xfrm>
+            <a:off x="685800" y="5989320"/>
+            <a:ext cx="2743200" cy="274320"/>
           </a:xfrm>
           <a:prstGeom prst="roundRect">
             <a:avLst>
@@ -4650,7 +4687,7 @@
                 <a:ea typeface="Malgun Gothic" pitchFamily="34" charset="-122"/>
                 <a:cs typeface="Malgun Gothic" pitchFamily="34" charset="-120"/>
               </a:rPr>
-              <a:t>실제 홈페이지 화면</a:t>
+              <a:t>콘텐츠 변환기 · 프롬프트 생성 화면</a:t>
             </a:r>
             <a:endParaRPr lang="en-US" sz="1050" dirty="0"/>
           </a:p>
@@ -4658,73 +4695,14 @@
       </p:sp>
       <p:sp>
         <p:nvSpPr>
-          <p:cNvPr id="7" name="Shape 4"/>
+          <p:cNvPr id="8" name="Shape 5"/>
           <p:cNvSpPr/>
           <p:nvPr/>
         </p:nvSpPr>
         <p:spPr>
           <a:xfrm>
-            <a:off x="8641080" y="1828800"/>
-            <a:ext cx="3017520" cy="640080"/>
-          </a:xfrm>
-          <a:prstGeom prst="rect">
-            <a:avLst/>
-          </a:prstGeom>
-          <a:solidFill>
-            <a:srgbClr val="103D3A"/>
-          </a:solidFill>
-          <a:ln/>
-        </p:spPr>
-      </p:sp>
-      <p:sp>
-        <p:nvSpPr>
-          <p:cNvPr id="8" name="Text 5"/>
-          <p:cNvSpPr txBox="1"/>
-          <p:nvPr/>
-        </p:nvSpPr>
-        <p:spPr>
-          <a:xfrm>
-            <a:off x="8869680" y="1828800"/>
-            <a:ext cx="2743200" cy="640080"/>
-          </a:xfrm>
-          <a:prstGeom prst="rect">
-            <a:avLst/>
-          </a:prstGeom>
-          <a:noFill/>
-          <a:ln/>
-        </p:spPr>
-        <p:txBody>
-          <a:bodyPr wrap="square" lIns="0" tIns="0" rIns="0" bIns="0" rtlCol="0" anchor="ctr"/>
-          <a:lstStyle/>
-          <a:p>
-            <a:pPr indent="0" marL="0">
-              <a:buNone/>
-            </a:pPr>
-            <a:r>
-              <a:rPr lang="en-US" sz="1800" b="1" dirty="0">
-                <a:solidFill>
-                  <a:srgbClr val="FFFFFF"/>
-                </a:solidFill>
-                <a:latin typeface="Malgun Gothic" pitchFamily="34" charset="0"/>
-                <a:ea typeface="Malgun Gothic" pitchFamily="34" charset="-122"/>
-                <a:cs typeface="Malgun Gothic" pitchFamily="34" charset="-120"/>
-              </a:rPr>
-              <a:t>브랜드 이야기</a:t>
-            </a:r>
-            <a:endParaRPr lang="en-US" sz="1800" dirty="0"/>
-          </a:p>
-        </p:txBody>
-      </p:sp>
-      <p:sp>
-        <p:nvSpPr>
-          <p:cNvPr id="9" name="Shape 6"/>
-          <p:cNvSpPr/>
-          <p:nvPr/>
-        </p:nvSpPr>
-        <p:spPr>
-          <a:xfrm>
-            <a:off x="8641080" y="2606040"/>
-            <a:ext cx="3017520" cy="640080"/>
+            <a:off x="5897880" y="1828800"/>
+            <a:ext cx="2697480" cy="3977640"/>
           </a:xfrm>
           <a:prstGeom prst="rect">
             <a:avLst/>
@@ -4742,14 +4720,155 @@
       </p:sp>
       <p:sp>
         <p:nvSpPr>
+          <p:cNvPr id="9" name="Text 6"/>
+          <p:cNvSpPr txBox="1"/>
+          <p:nvPr/>
+        </p:nvSpPr>
+        <p:spPr>
+          <a:xfrm>
+            <a:off x="6080760" y="1965960"/>
+            <a:ext cx="2377440" cy="320040"/>
+          </a:xfrm>
+          <a:prstGeom prst="rect">
+            <a:avLst/>
+          </a:prstGeom>
+          <a:noFill/>
+          <a:ln/>
+        </p:spPr>
+        <p:txBody>
+          <a:bodyPr wrap="square" lIns="0" tIns="0" rIns="0" bIns="0" rtlCol="0" anchor="t"/>
+          <a:lstStyle/>
+          <a:p>
+            <a:pPr indent="0" marL="0">
+              <a:buNone/>
+            </a:pPr>
+            <a:r>
+              <a:rPr lang="en-US" sz="1300" b="1" dirty="0">
+                <a:solidFill>
+                  <a:srgbClr val="77746B"/>
+                </a:solidFill>
+                <a:latin typeface="Malgun Gothic" pitchFamily="34" charset="0"/>
+                <a:ea typeface="Malgun Gothic" pitchFamily="34" charset="-122"/>
+                <a:cs typeface="Malgun Gothic" pitchFamily="34" charset="-120"/>
+              </a:rPr>
+              <a:t>인스타그램</a:t>
+            </a:r>
+            <a:endParaRPr lang="en-US" sz="1300" dirty="0"/>
+          </a:p>
+        </p:txBody>
+      </p:sp>
+      <p:sp>
+        <p:nvSpPr>
           <p:cNvPr id="10" name="Text 7"/>
           <p:cNvSpPr txBox="1"/>
           <p:nvPr/>
         </p:nvSpPr>
         <p:spPr>
           <a:xfrm>
-            <a:off x="8869680" y="2606040"/>
-            <a:ext cx="2743200" cy="640080"/>
+            <a:off x="6080760" y="2331720"/>
+            <a:ext cx="2377440" cy="3383280"/>
+          </a:xfrm>
+          <a:prstGeom prst="rect">
+            <a:avLst/>
+          </a:prstGeom>
+          <a:noFill/>
+          <a:ln/>
+        </p:spPr>
+        <p:txBody>
+          <a:bodyPr wrap="square" lIns="0" tIns="0" rIns="0" bIns="0" rtlCol="0" anchor="t"/>
+          <a:lstStyle/>
+          <a:p>
+            <a:pPr indent="0" marL="0">
+              <a:lnSpc>
+                <a:spcPct val="120000"/>
+              </a:lnSpc>
+              <a:buNone/>
+            </a:pPr>
+            <a:r>
+              <a:rPr lang="en-US" sz="1350" dirty="0">
+                <a:solidFill>
+                  <a:srgbClr val="17221F"/>
+                </a:solidFill>
+                <a:latin typeface="Malgun Gothic" pitchFamily="34" charset="0"/>
+                <a:ea typeface="Malgun Gothic" pitchFamily="34" charset="-122"/>
+                <a:cs typeface="Malgun Gothic" pitchFamily="34" charset="-120"/>
+              </a:rPr>
+              <a:t>떡 선물,</a:t>
+            </a:r>
+            <a:endParaRPr lang="en-US" sz="1350" dirty="0"/>
+          </a:p>
+          <a:p>
+            <a:pPr indent="0" marL="0">
+              <a:lnSpc>
+                <a:spcPct val="120000"/>
+              </a:lnSpc>
+              <a:buNone/>
+            </a:pPr>
+            <a:r>
+              <a:rPr lang="en-US" sz="1350" dirty="0">
+                <a:solidFill>
+                  <a:srgbClr val="17221F"/>
+                </a:solidFill>
+                <a:latin typeface="Malgun Gothic" pitchFamily="34" charset="0"/>
+                <a:ea typeface="Malgun Gothic" pitchFamily="34" charset="-122"/>
+                <a:cs typeface="Malgun Gothic" pitchFamily="34" charset="-120"/>
+              </a:rPr>
+              <a:t>아직도 고민되시나요.</a:t>
+            </a:r>
+            <a:endParaRPr lang="en-US" sz="1350" dirty="0"/>
+          </a:p>
+          <a:p>
+            <a:pPr indent="0" marL="0">
+              <a:lnSpc>
+                <a:spcPct val="120000"/>
+              </a:lnSpc>
+              <a:buNone/>
+            </a:pPr>
+            <a:r>
+              <a:rPr lang="en-US" sz="1350" dirty="0">
+                <a:solidFill>
+                  <a:srgbClr val="17221F"/>
+                </a:solidFill>
+                <a:latin typeface="Malgun Gothic" pitchFamily="34" charset="0"/>
+                <a:ea typeface="Malgun Gothic" pitchFamily="34" charset="-122"/>
+                <a:cs typeface="Malgun Gothic" pitchFamily="34" charset="-120"/>
+              </a:rPr>
+              <a:t>3대째 이어온 방앗간에서, 무방부제 원칙으로 빚습니다.</a:t>
+            </a:r>
+            <a:endParaRPr lang="en-US" sz="1350" dirty="0"/>
+          </a:p>
+          <a:p>
+            <a:pPr indent="0" marL="0">
+              <a:lnSpc>
+                <a:spcPct val="120000"/>
+              </a:lnSpc>
+              <a:buNone/>
+            </a:pPr>
+            <a:r>
+              <a:rPr lang="en-US" sz="1350" dirty="0">
+                <a:solidFill>
+                  <a:srgbClr val="17221F"/>
+                </a:solidFill>
+                <a:latin typeface="Malgun Gothic" pitchFamily="34" charset="0"/>
+                <a:ea typeface="Malgun Gothic" pitchFamily="34" charset="-122"/>
+                <a:cs typeface="Malgun Gothic" pitchFamily="34" charset="-120"/>
+              </a:rPr>
+              <a:t>어른께 드릴 선물이 필요하시다면, 저장해두세요.</a:t>
+            </a:r>
+            <a:endParaRPr lang="en-US" sz="1350" dirty="0"/>
+          </a:p>
+        </p:txBody>
+      </p:sp>
+      <p:sp>
+        <p:nvSpPr>
+          <p:cNvPr id="11" name="Text 8"/>
+          <p:cNvSpPr txBox="1"/>
+          <p:nvPr/>
+        </p:nvSpPr>
+        <p:spPr>
+          <a:xfrm>
+            <a:off x="8595360" y="3520440"/>
+            <a:ext cx="365760" cy="548640"/>
           </a:xfrm>
           <a:prstGeom prst="rect">
             <a:avLst/>
@@ -4761,41 +4880,203 @@
           <a:bodyPr wrap="square" lIns="0" tIns="0" rIns="0" bIns="0" rtlCol="0" anchor="ctr"/>
           <a:lstStyle/>
           <a:p>
-            <a:pPr indent="0" marL="0">
-              <a:buNone/>
-            </a:pPr>
-            <a:r>
-              <a:rPr lang="en-US" sz="1800" b="1" dirty="0">
-                <a:solidFill>
-                  <a:srgbClr val="103D3A"/>
-                </a:solidFill>
-                <a:latin typeface="Malgun Gothic" pitchFamily="34" charset="0"/>
-                <a:ea typeface="Malgun Gothic" pitchFamily="34" charset="-122"/>
-                <a:cs typeface="Malgun Gothic" pitchFamily="34" charset="-120"/>
-              </a:rPr>
-              <a:t>대표 상품</a:t>
-            </a:r>
-            <a:endParaRPr lang="en-US" sz="1800" dirty="0"/>
-          </a:p>
-        </p:txBody>
-      </p:sp>
-      <p:sp>
-        <p:nvSpPr>
-          <p:cNvPr id="11" name="Shape 8"/>
+            <a:pPr algn="ctr" indent="0" marL="0">
+              <a:buNone/>
+            </a:pPr>
+            <a:r>
+              <a:rPr lang="en-US" sz="2400" b="1" dirty="0">
+                <a:solidFill>
+                  <a:srgbClr val="C9A46A"/>
+                </a:solidFill>
+                <a:latin typeface="Malgun Gothic" pitchFamily="34" charset="0"/>
+                <a:ea typeface="Malgun Gothic" pitchFamily="34" charset="-122"/>
+                <a:cs typeface="Malgun Gothic" pitchFamily="34" charset="-120"/>
+              </a:rPr>
+              <a:t>→</a:t>
+            </a:r>
+            <a:endParaRPr lang="en-US" sz="2400" dirty="0"/>
+          </a:p>
+        </p:txBody>
+      </p:sp>
+      <p:sp>
+        <p:nvSpPr>
+          <p:cNvPr id="12" name="Shape 9"/>
           <p:cNvSpPr/>
           <p:nvPr/>
         </p:nvSpPr>
         <p:spPr>
           <a:xfrm>
-            <a:off x="8641080" y="3383280"/>
-            <a:ext cx="3017520" cy="640080"/>
+            <a:off x="8961120" y="1828800"/>
+            <a:ext cx="2697480" cy="3977640"/>
           </a:xfrm>
           <a:prstGeom prst="rect">
             <a:avLst/>
           </a:prstGeom>
           <a:solidFill>
-            <a:srgbClr val="FFFFFF"/>
+            <a:srgbClr val="103D3A"/>
           </a:solidFill>
+          <a:ln/>
+        </p:spPr>
+      </p:sp>
+      <p:sp>
+        <p:nvSpPr>
+          <p:cNvPr id="13" name="Text 10"/>
+          <p:cNvSpPr txBox="1"/>
+          <p:nvPr/>
+        </p:nvSpPr>
+        <p:spPr>
+          <a:xfrm>
+            <a:off x="9144000" y="1965960"/>
+            <a:ext cx="2377440" cy="320040"/>
+          </a:xfrm>
+          <a:prstGeom prst="rect">
+            <a:avLst/>
+          </a:prstGeom>
+          <a:noFill/>
+          <a:ln/>
+        </p:spPr>
+        <p:txBody>
+          <a:bodyPr wrap="square" lIns="0" tIns="0" rIns="0" bIns="0" rtlCol="0" anchor="t"/>
+          <a:lstStyle/>
+          <a:p>
+            <a:pPr indent="0" marL="0">
+              <a:buNone/>
+            </a:pPr>
+            <a:r>
+              <a:rPr lang="en-US" sz="1300" b="1" dirty="0">
+                <a:solidFill>
+                  <a:srgbClr val="C9A46A"/>
+                </a:solidFill>
+                <a:latin typeface="Malgun Gothic" pitchFamily="34" charset="0"/>
+                <a:ea typeface="Malgun Gothic" pitchFamily="34" charset="-122"/>
+                <a:cs typeface="Malgun Gothic" pitchFamily="34" charset="-120"/>
+              </a:rPr>
+              <a:t>스레드 · 사장님 말투</a:t>
+            </a:r>
+            <a:endParaRPr lang="en-US" sz="1300" dirty="0"/>
+          </a:p>
+        </p:txBody>
+      </p:sp>
+      <p:sp>
+        <p:nvSpPr>
+          <p:cNvPr id="14" name="Text 11"/>
+          <p:cNvSpPr txBox="1"/>
+          <p:nvPr/>
+        </p:nvSpPr>
+        <p:spPr>
+          <a:xfrm>
+            <a:off x="9144000" y="2331720"/>
+            <a:ext cx="2377440" cy="3383280"/>
+          </a:xfrm>
+          <a:prstGeom prst="rect">
+            <a:avLst/>
+          </a:prstGeom>
+          <a:noFill/>
+          <a:ln/>
+        </p:spPr>
+        <p:txBody>
+          <a:bodyPr wrap="square" lIns="0" tIns="0" rIns="0" bIns="0" rtlCol="0" anchor="t"/>
+          <a:lstStyle/>
+          <a:p>
+            <a:pPr indent="0" marL="0">
+              <a:lnSpc>
+                <a:spcPct val="120000"/>
+              </a:lnSpc>
+              <a:buNone/>
+            </a:pPr>
+            <a:r>
+              <a:rPr lang="en-US" sz="1350" dirty="0">
+                <a:solidFill>
+                  <a:srgbClr val="FFFFFF"/>
+                </a:solidFill>
+                <a:latin typeface="Malgun Gothic" pitchFamily="34" charset="0"/>
+                <a:ea typeface="Malgun Gothic" pitchFamily="34" charset="-122"/>
+                <a:cs typeface="Malgun Gothic" pitchFamily="34" charset="-120"/>
+              </a:rPr>
+              <a:t>요즘 어른들 선물, 뭘 드려야 할지 고민 많으시죠. 저희도 그 마음 알아서 포장 하나하나 신경 씁니다. 3대째 이어온 방앗간에서 무첨가 원칙으로 빚은 떡이에요.</a:t>
+            </a:r>
+            <a:endParaRPr lang="en-US" sz="1350" dirty="0"/>
+          </a:p>
+        </p:txBody>
+      </p:sp>
+      <p:sp>
+        <p:nvSpPr>
+          <p:cNvPr id="15" name="Text 12"/>
+          <p:cNvSpPr txBox="1"/>
+          <p:nvPr/>
+        </p:nvSpPr>
+        <p:spPr>
+          <a:xfrm>
+            <a:off x="5897880" y="5989320"/>
+            <a:ext cx="3291840" cy="274320"/>
+          </a:xfrm>
+          <a:prstGeom prst="roundRect">
+            <a:avLst>
+              <a:gd name="adj" fmla="val 50000"/>
+            </a:avLst>
+          </a:prstGeom>
+          <a:solidFill>
+            <a:srgbClr val="EFE2C8"/>
+          </a:solidFill>
+          <a:ln/>
+        </p:spPr>
+        <p:txBody>
+          <a:bodyPr wrap="square" lIns="0" tIns="0" rIns="0" bIns="0" rtlCol="0" anchor="ctr"/>
+          <a:lstStyle/>
+          <a:p>
+            <a:pPr algn="ctr" indent="0" marL="0">
+              <a:buNone/>
+            </a:pPr>
+            <a:r>
+              <a:rPr lang="en-US" sz="1050" b="1" dirty="0">
+                <a:solidFill>
+                  <a:srgbClr val="17221F"/>
+                </a:solidFill>
+                <a:latin typeface="Malgun Gothic" pitchFamily="34" charset="0"/>
+                <a:ea typeface="Malgun Gothic" pitchFamily="34" charset="-122"/>
+                <a:cs typeface="Malgun Gothic" pitchFamily="34" charset="-120"/>
+              </a:rPr>
+              <a:t>붙여넣어 받은 글 예시 · 일부 표현 다듬음</a:t>
+            </a:r>
+            <a:endParaRPr lang="en-US" sz="1050" dirty="0"/>
+          </a:p>
+        </p:txBody>
+      </p:sp>
+      <p:sp>
+        <p:nvSpPr>
+          <p:cNvPr id="16" name="Shape 13"/>
+          <p:cNvSpPr/>
+          <p:nvPr/>
+        </p:nvSpPr>
+        <p:spPr>
+          <a:xfrm>
+            <a:off x="8961120" y="6400800"/>
+            <a:ext cx="1188720" cy="41148"/>
+          </a:xfrm>
+          <a:prstGeom prst="rect">
+            <a:avLst/>
+          </a:prstGeom>
+          <a:solidFill>
+            <a:srgbClr val="103D3A"/>
+          </a:solidFill>
+          <a:ln/>
+        </p:spPr>
+      </p:sp>
+      <p:sp>
+        <p:nvSpPr>
+          <p:cNvPr id="17" name="Shape 14"/>
+          <p:cNvSpPr/>
+          <p:nvPr/>
+        </p:nvSpPr>
+        <p:spPr>
+          <a:xfrm>
+            <a:off x="10149840" y="6420917"/>
+            <a:ext cx="1508760" cy="0"/>
+          </a:xfrm>
+          <a:prstGeom prst="line">
+            <a:avLst/>
+          </a:prstGeom>
+          <a:noFill/>
           <a:ln w="9525">
             <a:solidFill>
               <a:srgbClr val="D9D3C5"/>
@@ -4803,196 +5084,6 @@
             <a:prstDash val="solid"/>
           </a:ln>
         </p:spPr>
-      </p:sp>
-      <p:sp>
-        <p:nvSpPr>
-          <p:cNvPr id="12" name="Text 9"/>
-          <p:cNvSpPr txBox="1"/>
-          <p:nvPr/>
-        </p:nvSpPr>
-        <p:spPr>
-          <a:xfrm>
-            <a:off x="8869680" y="3383280"/>
-            <a:ext cx="2743200" cy="640080"/>
-          </a:xfrm>
-          <a:prstGeom prst="rect">
-            <a:avLst/>
-          </a:prstGeom>
-          <a:noFill/>
-          <a:ln/>
-        </p:spPr>
-        <p:txBody>
-          <a:bodyPr wrap="square" lIns="0" tIns="0" rIns="0" bIns="0" rtlCol="0" anchor="ctr"/>
-          <a:lstStyle/>
-          <a:p>
-            <a:pPr indent="0" marL="0">
-              <a:buNone/>
-            </a:pPr>
-            <a:r>
-              <a:rPr lang="en-US" sz="1800" b="1" dirty="0">
-                <a:solidFill>
-                  <a:srgbClr val="103D3A"/>
-                </a:solidFill>
-                <a:latin typeface="Malgun Gothic" pitchFamily="34" charset="0"/>
-                <a:ea typeface="Malgun Gothic" pitchFamily="34" charset="-122"/>
-                <a:cs typeface="Malgun Gothic" pitchFamily="34" charset="-120"/>
-              </a:rPr>
-              <a:t>선물세트</a:t>
-            </a:r>
-            <a:endParaRPr lang="en-US" sz="1800" dirty="0"/>
-          </a:p>
-        </p:txBody>
-      </p:sp>
-      <p:sp>
-        <p:nvSpPr>
-          <p:cNvPr id="13" name="Shape 10"/>
-          <p:cNvSpPr/>
-          <p:nvPr/>
-        </p:nvSpPr>
-        <p:spPr>
-          <a:xfrm>
-            <a:off x="8641080" y="4160520"/>
-            <a:ext cx="3017520" cy="640080"/>
-          </a:xfrm>
-          <a:prstGeom prst="rect">
-            <a:avLst/>
-          </a:prstGeom>
-          <a:solidFill>
-            <a:srgbClr val="FFFFFF"/>
-          </a:solidFill>
-          <a:ln w="9525">
-            <a:solidFill>
-              <a:srgbClr val="D9D3C5"/>
-            </a:solidFill>
-            <a:prstDash val="solid"/>
-          </a:ln>
-        </p:spPr>
-      </p:sp>
-      <p:sp>
-        <p:nvSpPr>
-          <p:cNvPr id="14" name="Text 11"/>
-          <p:cNvSpPr txBox="1"/>
-          <p:nvPr/>
-        </p:nvSpPr>
-        <p:spPr>
-          <a:xfrm>
-            <a:off x="8869680" y="4160520"/>
-            <a:ext cx="2743200" cy="640080"/>
-          </a:xfrm>
-          <a:prstGeom prst="rect">
-            <a:avLst/>
-          </a:prstGeom>
-          <a:noFill/>
-          <a:ln/>
-        </p:spPr>
-        <p:txBody>
-          <a:bodyPr wrap="square" lIns="0" tIns="0" rIns="0" bIns="0" rtlCol="0" anchor="ctr"/>
-          <a:lstStyle/>
-          <a:p>
-            <a:pPr indent="0" marL="0">
-              <a:buNone/>
-            </a:pPr>
-            <a:r>
-              <a:rPr lang="en-US" sz="1800" b="1" dirty="0">
-                <a:solidFill>
-                  <a:srgbClr val="103D3A"/>
-                </a:solidFill>
-                <a:latin typeface="Malgun Gothic" pitchFamily="34" charset="0"/>
-                <a:ea typeface="Malgun Gothic" pitchFamily="34" charset="-122"/>
-                <a:cs typeface="Malgun Gothic" pitchFamily="34" charset="-120"/>
-              </a:rPr>
-              <a:t>매장 안내</a:t>
-            </a:r>
-            <a:endParaRPr lang="en-US" sz="1800" dirty="0"/>
-          </a:p>
-        </p:txBody>
-      </p:sp>
-      <p:sp>
-        <p:nvSpPr>
-          <p:cNvPr id="15" name="Text 12"/>
-          <p:cNvSpPr txBox="1"/>
-          <p:nvPr/>
-        </p:nvSpPr>
-        <p:spPr>
-          <a:xfrm>
-            <a:off x="8641080" y="5029200"/>
-            <a:ext cx="3017520" cy="548640"/>
-          </a:xfrm>
-          <a:prstGeom prst="rect">
-            <a:avLst/>
-          </a:prstGeom>
-          <a:noFill/>
-          <a:ln/>
-        </p:spPr>
-        <p:txBody>
-          <a:bodyPr wrap="square" lIns="0" tIns="0" rIns="0" bIns="0" rtlCol="0" anchor="t"/>
-          <a:lstStyle/>
-          <a:p>
-            <a:pPr indent="0" marL="0">
-              <a:buNone/>
-            </a:pPr>
-            <a:r>
-              <a:rPr lang="en-US" sz="1300" dirty="0">
-                <a:solidFill>
-                  <a:srgbClr val="77746B"/>
-                </a:solidFill>
-                <a:latin typeface="Malgun Gothic" pitchFamily="34" charset="0"/>
-                <a:ea typeface="Malgun Gothic" pitchFamily="34" charset="-122"/>
-                <a:cs typeface="Malgun Gothic" pitchFamily="34" charset="-120"/>
-              </a:rPr>
-              <a:t>대표 운영 OS와 별개로 만든 웹사이트</a:t>
-            </a:r>
-            <a:endParaRPr lang="en-US" sz="1300" dirty="0"/>
-          </a:p>
-        </p:txBody>
-      </p:sp>
-      <p:sp>
-        <p:nvSpPr>
-          <p:cNvPr id="16" name="Text 13">
-            <a:hlinkClick r:id="rId3" tooltip="https://ddeokgiri-v2.vercel.app/"/>
-          </p:cNvPr>
-          <p:cNvSpPr txBox="1"/>
-          <p:nvPr/>
-        </p:nvSpPr>
-        <p:spPr>
-          <a:xfrm>
-            <a:off x="8641080" y="5532120"/>
-            <a:ext cx="3017520" cy="320040"/>
-          </a:xfrm>
-          <a:prstGeom prst="rect">
-            <a:avLst/>
-          </a:prstGeom>
-          <a:noFill/>
-          <a:ln/>
-        </p:spPr>
-        <p:txBody>
-          <a:bodyPr wrap="square" lIns="0" tIns="0" rIns="0" bIns="0" rtlCol="0" anchor="t"/>
-          <a:lstStyle/>
-          <a:p>
-            <a:pPr indent="0" marL="0">
-              <a:buNone/>
-            </a:pPr>
-            <a:r>
-              <a:rPr lang="en-US" sz="1300" b="1" u="sng" dirty="0">
-                <a:solidFill>
-                  <a:srgbClr val="103D3A"/>
-                </a:solidFill>
-                <a:latin typeface="Malgun Gothic" pitchFamily="34" charset="0"/>
-                <a:ea typeface="Malgun Gothic" pitchFamily="34" charset="-122"/>
-                <a:cs typeface="Malgun Gothic" pitchFamily="34" charset="-120"/>
-                <a:hlinkClick r:id="rId3" invalidUrl="" action="" tgtFrame="" tooltip="https://ddeokgiri-v2.vercel.app/" history="1" highlightClick="0" endSnd="0">
-                  <a:extLst>
-                    <a:ext uri="{A12FA001-AC4F-418D-AE19-62706E023703}">
-                      <ahyp:hlinkClr xmlns:ahyp="http://schemas.microsoft.com/office/drawing/2018/hyperlinkcolor" val="tx"/>
-                    </a:ext>
-                  </a:extLst>
-                </a:hlinkClick>
-              </a:rPr>
-              <a:t>ddeokgiri-v2.vercel.app</a:t>
-            </a:r>
-            <a:endParaRPr lang="en-US" sz="1300" dirty="0"/>
-          </a:p>
-        </p:txBody>
       </p:sp>
       <p:sp>
         <p:nvSpPr>
@@ -5100,7 +5191,7 @@
                 <a:ea typeface="Malgun Gothic" pitchFamily="34" charset="-122"/>
                 <a:cs typeface="Malgun Gothic" pitchFamily="34" charset="-120"/>
               </a:rPr>
-              <a:t>별도 프로그램 · 콘텐츠 변환 도구</a:t>
+              <a:t>별도 프로그램 · 브랜드 홈페이지</a:t>
             </a:r>
             <a:endParaRPr lang="en-US" sz="1400" dirty="0"/>
           </a:p>
@@ -5139,7 +5230,7 @@
                 <a:ea typeface="Malgun Gothic" pitchFamily="34" charset="-122"/>
                 <a:cs typeface="Malgun Gothic" pitchFamily="34" charset="-120"/>
               </a:rPr>
-              <a:t>인스타그램 글을, 스레드 말투로</a:t>
+              <a:t>고객이 만나는 떡기리도, AI와 직접</a:t>
             </a:r>
             <a:endParaRPr lang="en-US" sz="3200" dirty="0"/>
           </a:p>
@@ -5147,53 +5238,14 @@
       </p:sp>
       <p:sp>
         <p:nvSpPr>
-          <p:cNvPr id="4" name="Text 2"/>
-          <p:cNvSpPr txBox="1"/>
-          <p:nvPr/>
-        </p:nvSpPr>
-        <p:spPr>
-          <a:xfrm>
-            <a:off x="685800" y="1508760"/>
-            <a:ext cx="10515600" cy="365760"/>
-          </a:xfrm>
-          <a:prstGeom prst="rect">
-            <a:avLst/>
-          </a:prstGeom>
-          <a:noFill/>
-          <a:ln/>
-        </p:spPr>
-        <p:txBody>
-          <a:bodyPr wrap="square" lIns="0" tIns="0" rIns="0" bIns="0" rtlCol="0" anchor="t"/>
-          <a:lstStyle/>
-          <a:p>
-            <a:pPr indent="0" marL="0">
-              <a:buNone/>
-            </a:pPr>
-            <a:r>
-              <a:rPr lang="en-US" sz="1500" b="1" dirty="0">
-                <a:solidFill>
-                  <a:srgbClr val="103D3A"/>
-                </a:solidFill>
-                <a:latin typeface="Malgun Gothic" pitchFamily="34" charset="0"/>
-                <a:ea typeface="Malgun Gothic" pitchFamily="34" charset="-122"/>
-                <a:cs typeface="Malgun Gothic" pitchFamily="34" charset="-120"/>
-              </a:rPr>
-              <a:t>주제 입력  →  프롬프트 생성  →  ChatGPT·Claude에 붙여넣기  →  인스타·스레드 글</a:t>
-            </a:r>
-            <a:endParaRPr lang="en-US" sz="1500" dirty="0"/>
-          </a:p>
-        </p:txBody>
-      </p:sp>
-      <p:sp>
-        <p:nvSpPr>
-          <p:cNvPr id="5" name="Shape 3"/>
+          <p:cNvPr id="4" name="Shape 2"/>
           <p:cNvSpPr/>
           <p:nvPr/>
         </p:nvSpPr>
         <p:spPr>
           <a:xfrm>
-            <a:off x="640080" y="1828800"/>
-            <a:ext cx="4937760" cy="4056611"/>
+            <a:off x="640080" y="1783080"/>
+            <a:ext cx="7680960" cy="4834890"/>
           </a:xfrm>
           <a:prstGeom prst="rect">
             <a:avLst/>
@@ -5218,7 +5270,9 @@
       </p:sp>
       <p:pic>
         <p:nvPicPr>
-          <p:cNvPr id="6" name="Image 0" descr="떡기리 발표 이미지">    </p:cNvPr>
+          <p:cNvPr id="5" name="Image 0" descr="떡기리 발표 이미지">
+            <a:hlinkClick r:id="rId2" tooltip="https://ddeokgiri-v2.vercel.app/"/>
+          </p:cNvPr>
           <p:cNvPicPr>
             <a:picLocks noChangeAspect="1"/>
           </p:cNvPicPr>
@@ -5232,8 +5286,8 @@
         </p:blipFill>
         <p:spPr>
           <a:xfrm>
-            <a:off x="685800" y="1874520"/>
-            <a:ext cx="4846320" cy="3965171"/>
+            <a:off x="685800" y="1828800"/>
+            <a:ext cx="7589520" cy="4743450"/>
           </a:xfrm>
           <a:prstGeom prst="rect">
             <a:avLst/>
@@ -5242,14 +5296,14 @@
       </p:pic>
       <p:sp>
         <p:nvSpPr>
-          <p:cNvPr id="7" name="Text 4"/>
-          <p:cNvSpPr txBox="1"/>
-          <p:nvPr/>
-        </p:nvSpPr>
-        <p:spPr>
-          <a:xfrm>
-            <a:off x="685800" y="5989320"/>
-            <a:ext cx="2743200" cy="274320"/>
+          <p:cNvPr id="6" name="Text 3"/>
+          <p:cNvSpPr txBox="1"/>
+          <p:nvPr/>
+        </p:nvSpPr>
+        <p:spPr>
+          <a:xfrm>
+            <a:off x="685800" y="6263640"/>
+            <a:ext cx="1737360" cy="274320"/>
           </a:xfrm>
           <a:prstGeom prst="roundRect">
             <a:avLst>
@@ -5277,7 +5331,7 @@
                 <a:ea typeface="Malgun Gothic" pitchFamily="34" charset="-122"/>
                 <a:cs typeface="Malgun Gothic" pitchFamily="34" charset="-120"/>
               </a:rPr>
-              <a:t>콘텐츠 변환기 · 프롬프트 생성 화면</a:t>
+              <a:t>실제 홈페이지 화면</a:t>
             </a:r>
             <a:endParaRPr lang="en-US" sz="1050" dirty="0"/>
           </a:p>
@@ -5285,14 +5339,73 @@
       </p:sp>
       <p:sp>
         <p:nvSpPr>
-          <p:cNvPr id="8" name="Shape 5"/>
+          <p:cNvPr id="7" name="Shape 4"/>
           <p:cNvSpPr/>
           <p:nvPr/>
         </p:nvSpPr>
         <p:spPr>
           <a:xfrm>
-            <a:off x="5897880" y="1828800"/>
-            <a:ext cx="2697480" cy="3977640"/>
+            <a:off x="8641080" y="1828800"/>
+            <a:ext cx="3017520" cy="640080"/>
+          </a:xfrm>
+          <a:prstGeom prst="rect">
+            <a:avLst/>
+          </a:prstGeom>
+          <a:solidFill>
+            <a:srgbClr val="103D3A"/>
+          </a:solidFill>
+          <a:ln/>
+        </p:spPr>
+      </p:sp>
+      <p:sp>
+        <p:nvSpPr>
+          <p:cNvPr id="8" name="Text 5"/>
+          <p:cNvSpPr txBox="1"/>
+          <p:nvPr/>
+        </p:nvSpPr>
+        <p:spPr>
+          <a:xfrm>
+            <a:off x="8869680" y="1828800"/>
+            <a:ext cx="2743200" cy="640080"/>
+          </a:xfrm>
+          <a:prstGeom prst="rect">
+            <a:avLst/>
+          </a:prstGeom>
+          <a:noFill/>
+          <a:ln/>
+        </p:spPr>
+        <p:txBody>
+          <a:bodyPr wrap="square" lIns="0" tIns="0" rIns="0" bIns="0" rtlCol="0" anchor="ctr"/>
+          <a:lstStyle/>
+          <a:p>
+            <a:pPr indent="0" marL="0">
+              <a:buNone/>
+            </a:pPr>
+            <a:r>
+              <a:rPr lang="en-US" sz="1800" b="1" dirty="0">
+                <a:solidFill>
+                  <a:srgbClr val="FFFFFF"/>
+                </a:solidFill>
+                <a:latin typeface="Malgun Gothic" pitchFamily="34" charset="0"/>
+                <a:ea typeface="Malgun Gothic" pitchFamily="34" charset="-122"/>
+                <a:cs typeface="Malgun Gothic" pitchFamily="34" charset="-120"/>
+              </a:rPr>
+              <a:t>브랜드 이야기</a:t>
+            </a:r>
+            <a:endParaRPr lang="en-US" sz="1800" dirty="0"/>
+          </a:p>
+        </p:txBody>
+      </p:sp>
+      <p:sp>
+        <p:nvSpPr>
+          <p:cNvPr id="9" name="Shape 6"/>
+          <p:cNvSpPr/>
+          <p:nvPr/>
+        </p:nvSpPr>
+        <p:spPr>
+          <a:xfrm>
+            <a:off x="8641080" y="2606040"/>
+            <a:ext cx="3017520" cy="640080"/>
           </a:xfrm>
           <a:prstGeom prst="rect">
             <a:avLst/>
@@ -5310,155 +5423,14 @@
       </p:sp>
       <p:sp>
         <p:nvSpPr>
-          <p:cNvPr id="9" name="Text 6"/>
-          <p:cNvSpPr txBox="1"/>
-          <p:nvPr/>
-        </p:nvSpPr>
-        <p:spPr>
-          <a:xfrm>
-            <a:off x="6080760" y="1965960"/>
-            <a:ext cx="2377440" cy="320040"/>
-          </a:xfrm>
-          <a:prstGeom prst="rect">
-            <a:avLst/>
-          </a:prstGeom>
-          <a:noFill/>
-          <a:ln/>
-        </p:spPr>
-        <p:txBody>
-          <a:bodyPr wrap="square" lIns="0" tIns="0" rIns="0" bIns="0" rtlCol="0" anchor="t"/>
-          <a:lstStyle/>
-          <a:p>
-            <a:pPr indent="0" marL="0">
-              <a:buNone/>
-            </a:pPr>
-            <a:r>
-              <a:rPr lang="en-US" sz="1300" b="1" dirty="0">
-                <a:solidFill>
-                  <a:srgbClr val="77746B"/>
-                </a:solidFill>
-                <a:latin typeface="Malgun Gothic" pitchFamily="34" charset="0"/>
-                <a:ea typeface="Malgun Gothic" pitchFamily="34" charset="-122"/>
-                <a:cs typeface="Malgun Gothic" pitchFamily="34" charset="-120"/>
-              </a:rPr>
-              <a:t>인스타그램</a:t>
-            </a:r>
-            <a:endParaRPr lang="en-US" sz="1300" dirty="0"/>
-          </a:p>
-        </p:txBody>
-      </p:sp>
-      <p:sp>
-        <p:nvSpPr>
           <p:cNvPr id="10" name="Text 7"/>
           <p:cNvSpPr txBox="1"/>
           <p:nvPr/>
         </p:nvSpPr>
         <p:spPr>
           <a:xfrm>
-            <a:off x="6080760" y="2331720"/>
-            <a:ext cx="2377440" cy="3383280"/>
-          </a:xfrm>
-          <a:prstGeom prst="rect">
-            <a:avLst/>
-          </a:prstGeom>
-          <a:noFill/>
-          <a:ln/>
-        </p:spPr>
-        <p:txBody>
-          <a:bodyPr wrap="square" lIns="0" tIns="0" rIns="0" bIns="0" rtlCol="0" anchor="t"/>
-          <a:lstStyle/>
-          <a:p>
-            <a:pPr indent="0" marL="0">
-              <a:lnSpc>
-                <a:spcPct val="120000"/>
-              </a:lnSpc>
-              <a:buNone/>
-            </a:pPr>
-            <a:r>
-              <a:rPr lang="en-US" sz="1350" dirty="0">
-                <a:solidFill>
-                  <a:srgbClr val="17221F"/>
-                </a:solidFill>
-                <a:latin typeface="Malgun Gothic" pitchFamily="34" charset="0"/>
-                <a:ea typeface="Malgun Gothic" pitchFamily="34" charset="-122"/>
-                <a:cs typeface="Malgun Gothic" pitchFamily="34" charset="-120"/>
-              </a:rPr>
-              <a:t>떡 선물,</a:t>
-            </a:r>
-            <a:endParaRPr lang="en-US" sz="1350" dirty="0"/>
-          </a:p>
-          <a:p>
-            <a:pPr indent="0" marL="0">
-              <a:lnSpc>
-                <a:spcPct val="120000"/>
-              </a:lnSpc>
-              <a:buNone/>
-            </a:pPr>
-            <a:r>
-              <a:rPr lang="en-US" sz="1350" dirty="0">
-                <a:solidFill>
-                  <a:srgbClr val="17221F"/>
-                </a:solidFill>
-                <a:latin typeface="Malgun Gothic" pitchFamily="34" charset="0"/>
-                <a:ea typeface="Malgun Gothic" pitchFamily="34" charset="-122"/>
-                <a:cs typeface="Malgun Gothic" pitchFamily="34" charset="-120"/>
-              </a:rPr>
-              <a:t>아직도 고민되시나요.</a:t>
-            </a:r>
-            <a:endParaRPr lang="en-US" sz="1350" dirty="0"/>
-          </a:p>
-          <a:p>
-            <a:pPr indent="0" marL="0">
-              <a:lnSpc>
-                <a:spcPct val="120000"/>
-              </a:lnSpc>
-              <a:buNone/>
-            </a:pPr>
-            <a:r>
-              <a:rPr lang="en-US" sz="1350" dirty="0">
-                <a:solidFill>
-                  <a:srgbClr val="17221F"/>
-                </a:solidFill>
-                <a:latin typeface="Malgun Gothic" pitchFamily="34" charset="0"/>
-                <a:ea typeface="Malgun Gothic" pitchFamily="34" charset="-122"/>
-                <a:cs typeface="Malgun Gothic" pitchFamily="34" charset="-120"/>
-              </a:rPr>
-              <a:t>3대째 이어온 방앗간에서, 무방부제 원칙으로 빚습니다.</a:t>
-            </a:r>
-            <a:endParaRPr lang="en-US" sz="1350" dirty="0"/>
-          </a:p>
-          <a:p>
-            <a:pPr indent="0" marL="0">
-              <a:lnSpc>
-                <a:spcPct val="120000"/>
-              </a:lnSpc>
-              <a:buNone/>
-            </a:pPr>
-            <a:r>
-              <a:rPr lang="en-US" sz="1350" dirty="0">
-                <a:solidFill>
-                  <a:srgbClr val="17221F"/>
-                </a:solidFill>
-                <a:latin typeface="Malgun Gothic" pitchFamily="34" charset="0"/>
-                <a:ea typeface="Malgun Gothic" pitchFamily="34" charset="-122"/>
-                <a:cs typeface="Malgun Gothic" pitchFamily="34" charset="-120"/>
-              </a:rPr>
-              <a:t>어른께 드릴 선물이 필요하시다면, 저장해두세요.</a:t>
-            </a:r>
-            <a:endParaRPr lang="en-US" sz="1350" dirty="0"/>
-          </a:p>
-        </p:txBody>
-      </p:sp>
-      <p:sp>
-        <p:nvSpPr>
-          <p:cNvPr id="11" name="Text 8"/>
-          <p:cNvSpPr txBox="1"/>
-          <p:nvPr/>
-        </p:nvSpPr>
-        <p:spPr>
-          <a:xfrm>
-            <a:off x="8595360" y="3520440"/>
-            <a:ext cx="365760" cy="548640"/>
+            <a:off x="8869680" y="2606040"/>
+            <a:ext cx="2743200" cy="640080"/>
           </a:xfrm>
           <a:prstGeom prst="rect">
             <a:avLst/>
@@ -5470,203 +5442,41 @@
           <a:bodyPr wrap="square" lIns="0" tIns="0" rIns="0" bIns="0" rtlCol="0" anchor="ctr"/>
           <a:lstStyle/>
           <a:p>
-            <a:pPr algn="ctr" indent="0" marL="0">
-              <a:buNone/>
-            </a:pPr>
-            <a:r>
-              <a:rPr lang="en-US" sz="2400" b="1" dirty="0">
-                <a:solidFill>
-                  <a:srgbClr val="C9A46A"/>
-                </a:solidFill>
-                <a:latin typeface="Malgun Gothic" pitchFamily="34" charset="0"/>
-                <a:ea typeface="Malgun Gothic" pitchFamily="34" charset="-122"/>
-                <a:cs typeface="Malgun Gothic" pitchFamily="34" charset="-120"/>
-              </a:rPr>
-              <a:t>→</a:t>
-            </a:r>
-            <a:endParaRPr lang="en-US" sz="2400" dirty="0"/>
-          </a:p>
-        </p:txBody>
-      </p:sp>
-      <p:sp>
-        <p:nvSpPr>
-          <p:cNvPr id="12" name="Shape 9"/>
+            <a:pPr indent="0" marL="0">
+              <a:buNone/>
+            </a:pPr>
+            <a:r>
+              <a:rPr lang="en-US" sz="1800" b="1" dirty="0">
+                <a:solidFill>
+                  <a:srgbClr val="103D3A"/>
+                </a:solidFill>
+                <a:latin typeface="Malgun Gothic" pitchFamily="34" charset="0"/>
+                <a:ea typeface="Malgun Gothic" pitchFamily="34" charset="-122"/>
+                <a:cs typeface="Malgun Gothic" pitchFamily="34" charset="-120"/>
+              </a:rPr>
+              <a:t>대표 상품</a:t>
+            </a:r>
+            <a:endParaRPr lang="en-US" sz="1800" dirty="0"/>
+          </a:p>
+        </p:txBody>
+      </p:sp>
+      <p:sp>
+        <p:nvSpPr>
+          <p:cNvPr id="11" name="Shape 8"/>
           <p:cNvSpPr/>
           <p:nvPr/>
         </p:nvSpPr>
         <p:spPr>
           <a:xfrm>
-            <a:off x="8961120" y="1828800"/>
-            <a:ext cx="2697480" cy="3977640"/>
+            <a:off x="8641080" y="3383280"/>
+            <a:ext cx="3017520" cy="640080"/>
           </a:xfrm>
           <a:prstGeom prst="rect">
             <a:avLst/>
           </a:prstGeom>
           <a:solidFill>
-            <a:srgbClr val="103D3A"/>
+            <a:srgbClr val="FFFFFF"/>
           </a:solidFill>
-          <a:ln/>
-        </p:spPr>
-      </p:sp>
-      <p:sp>
-        <p:nvSpPr>
-          <p:cNvPr id="13" name="Text 10"/>
-          <p:cNvSpPr txBox="1"/>
-          <p:nvPr/>
-        </p:nvSpPr>
-        <p:spPr>
-          <a:xfrm>
-            <a:off x="9144000" y="1965960"/>
-            <a:ext cx="2377440" cy="320040"/>
-          </a:xfrm>
-          <a:prstGeom prst="rect">
-            <a:avLst/>
-          </a:prstGeom>
-          <a:noFill/>
-          <a:ln/>
-        </p:spPr>
-        <p:txBody>
-          <a:bodyPr wrap="square" lIns="0" tIns="0" rIns="0" bIns="0" rtlCol="0" anchor="t"/>
-          <a:lstStyle/>
-          <a:p>
-            <a:pPr indent="0" marL="0">
-              <a:buNone/>
-            </a:pPr>
-            <a:r>
-              <a:rPr lang="en-US" sz="1300" b="1" dirty="0">
-                <a:solidFill>
-                  <a:srgbClr val="C9A46A"/>
-                </a:solidFill>
-                <a:latin typeface="Malgun Gothic" pitchFamily="34" charset="0"/>
-                <a:ea typeface="Malgun Gothic" pitchFamily="34" charset="-122"/>
-                <a:cs typeface="Malgun Gothic" pitchFamily="34" charset="-120"/>
-              </a:rPr>
-              <a:t>스레드 · 사장님 말투</a:t>
-            </a:r>
-            <a:endParaRPr lang="en-US" sz="1300" dirty="0"/>
-          </a:p>
-        </p:txBody>
-      </p:sp>
-      <p:sp>
-        <p:nvSpPr>
-          <p:cNvPr id="14" name="Text 11"/>
-          <p:cNvSpPr txBox="1"/>
-          <p:nvPr/>
-        </p:nvSpPr>
-        <p:spPr>
-          <a:xfrm>
-            <a:off x="9144000" y="2331720"/>
-            <a:ext cx="2377440" cy="3383280"/>
-          </a:xfrm>
-          <a:prstGeom prst="rect">
-            <a:avLst/>
-          </a:prstGeom>
-          <a:noFill/>
-          <a:ln/>
-        </p:spPr>
-        <p:txBody>
-          <a:bodyPr wrap="square" lIns="0" tIns="0" rIns="0" bIns="0" rtlCol="0" anchor="t"/>
-          <a:lstStyle/>
-          <a:p>
-            <a:pPr indent="0" marL="0">
-              <a:lnSpc>
-                <a:spcPct val="120000"/>
-              </a:lnSpc>
-              <a:buNone/>
-            </a:pPr>
-            <a:r>
-              <a:rPr lang="en-US" sz="1350" dirty="0">
-                <a:solidFill>
-                  <a:srgbClr val="FFFFFF"/>
-                </a:solidFill>
-                <a:latin typeface="Malgun Gothic" pitchFamily="34" charset="0"/>
-                <a:ea typeface="Malgun Gothic" pitchFamily="34" charset="-122"/>
-                <a:cs typeface="Malgun Gothic" pitchFamily="34" charset="-120"/>
-              </a:rPr>
-              <a:t>요즘 어른들 선물, 뭘 드려야 할지 고민 많으시죠. 저희도 그 마음 알아서 포장 하나하나 신경 씁니다. 3대째 이어온 방앗간에서 무첨가 원칙으로 빚은 떡이에요.</a:t>
-            </a:r>
-            <a:endParaRPr lang="en-US" sz="1350" dirty="0"/>
-          </a:p>
-        </p:txBody>
-      </p:sp>
-      <p:sp>
-        <p:nvSpPr>
-          <p:cNvPr id="15" name="Text 12"/>
-          <p:cNvSpPr txBox="1"/>
-          <p:nvPr/>
-        </p:nvSpPr>
-        <p:spPr>
-          <a:xfrm>
-            <a:off x="5897880" y="5989320"/>
-            <a:ext cx="3291840" cy="274320"/>
-          </a:xfrm>
-          <a:prstGeom prst="roundRect">
-            <a:avLst>
-              <a:gd name="adj" fmla="val 50000"/>
-            </a:avLst>
-          </a:prstGeom>
-          <a:solidFill>
-            <a:srgbClr val="EFE2C8"/>
-          </a:solidFill>
-          <a:ln/>
-        </p:spPr>
-        <p:txBody>
-          <a:bodyPr wrap="square" lIns="0" tIns="0" rIns="0" bIns="0" rtlCol="0" anchor="ctr"/>
-          <a:lstStyle/>
-          <a:p>
-            <a:pPr algn="ctr" indent="0" marL="0">
-              <a:buNone/>
-            </a:pPr>
-            <a:r>
-              <a:rPr lang="en-US" sz="1050" b="1" dirty="0">
-                <a:solidFill>
-                  <a:srgbClr val="17221F"/>
-                </a:solidFill>
-                <a:latin typeface="Malgun Gothic" pitchFamily="34" charset="0"/>
-                <a:ea typeface="Malgun Gothic" pitchFamily="34" charset="-122"/>
-                <a:cs typeface="Malgun Gothic" pitchFamily="34" charset="-120"/>
-              </a:rPr>
-              <a:t>붙여넣어 받은 글 예시 · 일부 표현 다듬음</a:t>
-            </a:r>
-            <a:endParaRPr lang="en-US" sz="1050" dirty="0"/>
-          </a:p>
-        </p:txBody>
-      </p:sp>
-      <p:sp>
-        <p:nvSpPr>
-          <p:cNvPr id="16" name="Shape 13"/>
-          <p:cNvSpPr/>
-          <p:nvPr/>
-        </p:nvSpPr>
-        <p:spPr>
-          <a:xfrm>
-            <a:off x="8961120" y="6400800"/>
-            <a:ext cx="1188720" cy="41148"/>
-          </a:xfrm>
-          <a:prstGeom prst="rect">
-            <a:avLst/>
-          </a:prstGeom>
-          <a:solidFill>
-            <a:srgbClr val="103D3A"/>
-          </a:solidFill>
-          <a:ln/>
-        </p:spPr>
-      </p:sp>
-      <p:sp>
-        <p:nvSpPr>
-          <p:cNvPr id="17" name="Shape 14"/>
-          <p:cNvSpPr/>
-          <p:nvPr/>
-        </p:nvSpPr>
-        <p:spPr>
-          <a:xfrm>
-            <a:off x="10149840" y="6420917"/>
-            <a:ext cx="1508760" cy="0"/>
-          </a:xfrm>
-          <a:prstGeom prst="line">
-            <a:avLst/>
-          </a:prstGeom>
-          <a:noFill/>
           <a:ln w="9525">
             <a:solidFill>
               <a:srgbClr val="D9D3C5"/>
@@ -5674,6 +5484,196 @@
             <a:prstDash val="solid"/>
           </a:ln>
         </p:spPr>
+      </p:sp>
+      <p:sp>
+        <p:nvSpPr>
+          <p:cNvPr id="12" name="Text 9"/>
+          <p:cNvSpPr txBox="1"/>
+          <p:nvPr/>
+        </p:nvSpPr>
+        <p:spPr>
+          <a:xfrm>
+            <a:off x="8869680" y="3383280"/>
+            <a:ext cx="2743200" cy="640080"/>
+          </a:xfrm>
+          <a:prstGeom prst="rect">
+            <a:avLst/>
+          </a:prstGeom>
+          <a:noFill/>
+          <a:ln/>
+        </p:spPr>
+        <p:txBody>
+          <a:bodyPr wrap="square" lIns="0" tIns="0" rIns="0" bIns="0" rtlCol="0" anchor="ctr"/>
+          <a:lstStyle/>
+          <a:p>
+            <a:pPr indent="0" marL="0">
+              <a:buNone/>
+            </a:pPr>
+            <a:r>
+              <a:rPr lang="en-US" sz="1800" b="1" dirty="0">
+                <a:solidFill>
+                  <a:srgbClr val="103D3A"/>
+                </a:solidFill>
+                <a:latin typeface="Malgun Gothic" pitchFamily="34" charset="0"/>
+                <a:ea typeface="Malgun Gothic" pitchFamily="34" charset="-122"/>
+                <a:cs typeface="Malgun Gothic" pitchFamily="34" charset="-120"/>
+              </a:rPr>
+              <a:t>선물세트</a:t>
+            </a:r>
+            <a:endParaRPr lang="en-US" sz="1800" dirty="0"/>
+          </a:p>
+        </p:txBody>
+      </p:sp>
+      <p:sp>
+        <p:nvSpPr>
+          <p:cNvPr id="13" name="Shape 10"/>
+          <p:cNvSpPr/>
+          <p:nvPr/>
+        </p:nvSpPr>
+        <p:spPr>
+          <a:xfrm>
+            <a:off x="8641080" y="4160520"/>
+            <a:ext cx="3017520" cy="640080"/>
+          </a:xfrm>
+          <a:prstGeom prst="rect">
+            <a:avLst/>
+          </a:prstGeom>
+          <a:solidFill>
+            <a:srgbClr val="FFFFFF"/>
+          </a:solidFill>
+          <a:ln w="9525">
+            <a:solidFill>
+              <a:srgbClr val="D9D3C5"/>
+            </a:solidFill>
+            <a:prstDash val="solid"/>
+          </a:ln>
+        </p:spPr>
+      </p:sp>
+      <p:sp>
+        <p:nvSpPr>
+          <p:cNvPr id="14" name="Text 11"/>
+          <p:cNvSpPr txBox="1"/>
+          <p:nvPr/>
+        </p:nvSpPr>
+        <p:spPr>
+          <a:xfrm>
+            <a:off x="8869680" y="4160520"/>
+            <a:ext cx="2743200" cy="640080"/>
+          </a:xfrm>
+          <a:prstGeom prst="rect">
+            <a:avLst/>
+          </a:prstGeom>
+          <a:noFill/>
+          <a:ln/>
+        </p:spPr>
+        <p:txBody>
+          <a:bodyPr wrap="square" lIns="0" tIns="0" rIns="0" bIns="0" rtlCol="0" anchor="ctr"/>
+          <a:lstStyle/>
+          <a:p>
+            <a:pPr indent="0" marL="0">
+              <a:buNone/>
+            </a:pPr>
+            <a:r>
+              <a:rPr lang="en-US" sz="1800" b="1" dirty="0">
+                <a:solidFill>
+                  <a:srgbClr val="103D3A"/>
+                </a:solidFill>
+                <a:latin typeface="Malgun Gothic" pitchFamily="34" charset="0"/>
+                <a:ea typeface="Malgun Gothic" pitchFamily="34" charset="-122"/>
+                <a:cs typeface="Malgun Gothic" pitchFamily="34" charset="-120"/>
+              </a:rPr>
+              <a:t>매장 안내</a:t>
+            </a:r>
+            <a:endParaRPr lang="en-US" sz="1800" dirty="0"/>
+          </a:p>
+        </p:txBody>
+      </p:sp>
+      <p:sp>
+        <p:nvSpPr>
+          <p:cNvPr id="15" name="Text 12"/>
+          <p:cNvSpPr txBox="1"/>
+          <p:nvPr/>
+        </p:nvSpPr>
+        <p:spPr>
+          <a:xfrm>
+            <a:off x="8641080" y="5029200"/>
+            <a:ext cx="3017520" cy="548640"/>
+          </a:xfrm>
+          <a:prstGeom prst="rect">
+            <a:avLst/>
+          </a:prstGeom>
+          <a:noFill/>
+          <a:ln/>
+        </p:spPr>
+        <p:txBody>
+          <a:bodyPr wrap="square" lIns="0" tIns="0" rIns="0" bIns="0" rtlCol="0" anchor="t"/>
+          <a:lstStyle/>
+          <a:p>
+            <a:pPr indent="0" marL="0">
+              <a:buNone/>
+            </a:pPr>
+            <a:r>
+              <a:rPr lang="en-US" sz="1300" dirty="0">
+                <a:solidFill>
+                  <a:srgbClr val="77746B"/>
+                </a:solidFill>
+                <a:latin typeface="Malgun Gothic" pitchFamily="34" charset="0"/>
+                <a:ea typeface="Malgun Gothic" pitchFamily="34" charset="-122"/>
+                <a:cs typeface="Malgun Gothic" pitchFamily="34" charset="-120"/>
+              </a:rPr>
+              <a:t>대표 운영 OS와 별개로 만든 웹사이트</a:t>
+            </a:r>
+            <a:endParaRPr lang="en-US" sz="1300" dirty="0"/>
+          </a:p>
+        </p:txBody>
+      </p:sp>
+      <p:sp>
+        <p:nvSpPr>
+          <p:cNvPr id="16" name="Text 13">
+            <a:hlinkClick r:id="rId3" tooltip="https://ddeokgiri-v2.vercel.app/"/>
+          </p:cNvPr>
+          <p:cNvSpPr txBox="1"/>
+          <p:nvPr/>
+        </p:nvSpPr>
+        <p:spPr>
+          <a:xfrm>
+            <a:off x="8641080" y="5532120"/>
+            <a:ext cx="3017520" cy="320040"/>
+          </a:xfrm>
+          <a:prstGeom prst="rect">
+            <a:avLst/>
+          </a:prstGeom>
+          <a:noFill/>
+          <a:ln/>
+        </p:spPr>
+        <p:txBody>
+          <a:bodyPr wrap="square" lIns="0" tIns="0" rIns="0" bIns="0" rtlCol="0" anchor="t"/>
+          <a:lstStyle/>
+          <a:p>
+            <a:pPr indent="0" marL="0">
+              <a:buNone/>
+            </a:pPr>
+            <a:r>
+              <a:rPr lang="en-US" sz="1300" b="1" u="sng" dirty="0">
+                <a:solidFill>
+                  <a:srgbClr val="103D3A"/>
+                </a:solidFill>
+                <a:latin typeface="Malgun Gothic" pitchFamily="34" charset="0"/>
+                <a:ea typeface="Malgun Gothic" pitchFamily="34" charset="-122"/>
+                <a:cs typeface="Malgun Gothic" pitchFamily="34" charset="-120"/>
+                <a:hlinkClick r:id="rId3" invalidUrl="" action="" tgtFrame="" tooltip="https://ddeokgiri-v2.vercel.app/" history="1" highlightClick="0" endSnd="0">
+                  <a:extLst>
+                    <a:ext uri="{A12FA001-AC4F-418D-AE19-62706E023703}">
+                      <ahyp:hlinkClr xmlns:ahyp="http://schemas.microsoft.com/office/drawing/2018/hyperlinkcolor" val="tx"/>
+                    </a:ext>
+                  </a:extLst>
+                </a:hlinkClick>
+              </a:rPr>
+              <a:t>ddeokgiri-v2.vercel.app</a:t>
+            </a:r>
+            <a:endParaRPr lang="en-US" sz="1300" dirty="0"/>
+          </a:p>
+        </p:txBody>
       </p:sp>
       <p:sp>
         <p:nvSpPr>
